--- a/KIO_Routing_Presentation.pptx
+++ b/KIO_Routing_Presentation.pptx
@@ -14323,7 +14323,7 @@
                 </a:solidFill>
                 <a:latin typeface="Calibri"/>
               </a:rPr>
-              <a:t>Latency 0.06 ms/message - about 9 000x faster than the decision</a:t>
+              <a:t>Latency well under 0.1 ms/message (median of 51 repeats) - about</a:t>
             </a:r>
           </a:p>
           <a:p>
@@ -14335,7 +14335,7 @@
                 </a:solidFill>
                 <a:latin typeface="Calibri"/>
               </a:rPr>
-              <a:t>model.</a:t>
+              <a:t>four orders of magnitude faster than the decision model.</a:t>
             </a:r>
           </a:p>
         </p:txBody>
@@ -14932,7 +14932,7 @@
                           </a:solidFill>
                           <a:latin typeface="Calibri"/>
                         </a:rPr>
-                        <a:t>0.06 ms</a:t>
+                        <a:t>&lt; 0.1 ms</a:t>
                       </a:r>
                     </a:p>
                   </a:txBody>
